--- a/livro_ia_educacao/saida/pptx/Cap18_slides.pptx
+++ b/livro_ia_educacao/saida/pptx/Cap18_slides.pptx
@@ -11219,11 +11219,11 @@
         <p:spPr>
           <a:xfrm>
             <a:off x="548640" y="1417320"/>
-            <a:ext cx="11064240" cy="762000"/>
+            <a:ext cx="11064240" cy="682752"/>
           </a:xfrm>
           <a:prstGeom prst="roundRect">
             <a:avLst>
-              <a:gd name="adj" fmla="val 14400"/>
+              <a:gd name="adj" fmla="val 16071"/>
             </a:avLst>
           </a:prstGeom>
           <a:solidFill>
@@ -11250,7 +11250,7 @@
         <p:spPr>
           <a:xfrm>
             <a:off x="731520" y="1417320"/>
-            <a:ext cx="548640" cy="762000"/>
+            <a:ext cx="548640" cy="682752"/>
           </a:xfrm>
           <a:prstGeom prst="rect">
             <a:avLst/>
@@ -11286,7 +11286,7 @@
         <p:spPr>
           <a:xfrm>
             <a:off x="1463040" y="1417320"/>
-            <a:ext cx="9966960" cy="762000"/>
+            <a:ext cx="9966960" cy="682752"/>
           </a:xfrm>
           <a:prstGeom prst="rect">
             <a:avLst/>
@@ -11321,12 +11321,12 @@
         </p:nvSpPr>
         <p:spPr>
           <a:xfrm>
-            <a:off x="548640" y="2289048"/>
-            <a:ext cx="11064240" cy="762000"/>
+            <a:off x="548640" y="2209800"/>
+            <a:ext cx="11064240" cy="682752"/>
           </a:xfrm>
           <a:prstGeom prst="roundRect">
             <a:avLst>
-              <a:gd name="adj" fmla="val 14400"/>
+              <a:gd name="adj" fmla="val 16071"/>
             </a:avLst>
           </a:prstGeom>
           <a:solidFill>
@@ -11352,8 +11352,8 @@
         </p:nvSpPr>
         <p:spPr>
           <a:xfrm>
-            <a:off x="731520" y="2289048"/>
-            <a:ext cx="548640" cy="762000"/>
+            <a:off x="731520" y="2209800"/>
+            <a:ext cx="548640" cy="682752"/>
           </a:xfrm>
           <a:prstGeom prst="rect">
             <a:avLst/>
@@ -11388,8 +11388,8 @@
         </p:nvSpPr>
         <p:spPr>
           <a:xfrm>
-            <a:off x="1463040" y="2289048"/>
-            <a:ext cx="9966960" cy="762000"/>
+            <a:off x="1463040" y="2209800"/>
+            <a:ext cx="9966960" cy="682752"/>
           </a:xfrm>
           <a:prstGeom prst="rect">
             <a:avLst/>
@@ -11424,12 +11424,12 @@
         </p:nvSpPr>
         <p:spPr>
           <a:xfrm>
-            <a:off x="548640" y="3160776"/>
-            <a:ext cx="11064240" cy="762000"/>
+            <a:off x="548640" y="3002280"/>
+            <a:ext cx="11064240" cy="682752"/>
           </a:xfrm>
           <a:prstGeom prst="roundRect">
             <a:avLst>
-              <a:gd name="adj" fmla="val 14400"/>
+              <a:gd name="adj" fmla="val 16071"/>
             </a:avLst>
           </a:prstGeom>
           <a:solidFill>
@@ -11455,8 +11455,8 @@
         </p:nvSpPr>
         <p:spPr>
           <a:xfrm>
-            <a:off x="731520" y="3160776"/>
-            <a:ext cx="548640" cy="762000"/>
+            <a:off x="731520" y="3002280"/>
+            <a:ext cx="548640" cy="682752"/>
           </a:xfrm>
           <a:prstGeom prst="rect">
             <a:avLst/>
@@ -11491,8 +11491,8 @@
         </p:nvSpPr>
         <p:spPr>
           <a:xfrm>
-            <a:off x="1463040" y="3160776"/>
-            <a:ext cx="9966960" cy="762000"/>
+            <a:off x="1463040" y="3002280"/>
+            <a:ext cx="9966960" cy="682752"/>
           </a:xfrm>
           <a:prstGeom prst="rect">
             <a:avLst/>
@@ -11527,12 +11527,12 @@
         </p:nvSpPr>
         <p:spPr>
           <a:xfrm>
-            <a:off x="548640" y="4032504"/>
-            <a:ext cx="11064240" cy="762000"/>
+            <a:off x="548640" y="3794760"/>
+            <a:ext cx="11064240" cy="682752"/>
           </a:xfrm>
           <a:prstGeom prst="roundRect">
             <a:avLst>
-              <a:gd name="adj" fmla="val 14400"/>
+              <a:gd name="adj" fmla="val 16071"/>
             </a:avLst>
           </a:prstGeom>
           <a:solidFill>
@@ -11558,8 +11558,8 @@
         </p:nvSpPr>
         <p:spPr>
           <a:xfrm>
-            <a:off x="731520" y="4032504"/>
-            <a:ext cx="548640" cy="762000"/>
+            <a:off x="731520" y="3794760"/>
+            <a:ext cx="548640" cy="682752"/>
           </a:xfrm>
           <a:prstGeom prst="rect">
             <a:avLst/>
@@ -11594,8 +11594,8 @@
         </p:nvSpPr>
         <p:spPr>
           <a:xfrm>
-            <a:off x="1463040" y="4032504"/>
-            <a:ext cx="9966960" cy="762000"/>
+            <a:off x="1463040" y="3794760"/>
+            <a:ext cx="9966960" cy="682752"/>
           </a:xfrm>
           <a:prstGeom prst="rect">
             <a:avLst/>
@@ -11630,12 +11630,12 @@
         </p:nvSpPr>
         <p:spPr>
           <a:xfrm>
-            <a:off x="548640" y="4904232"/>
-            <a:ext cx="11064240" cy="762000"/>
+            <a:off x="548640" y="4587240"/>
+            <a:ext cx="11064240" cy="682752"/>
           </a:xfrm>
           <a:prstGeom prst="roundRect">
             <a:avLst>
-              <a:gd name="adj" fmla="val 14400"/>
+              <a:gd name="adj" fmla="val 16071"/>
             </a:avLst>
           </a:prstGeom>
           <a:solidFill>
@@ -11661,8 +11661,8 @@
         </p:nvSpPr>
         <p:spPr>
           <a:xfrm>
-            <a:off x="731520" y="4904232"/>
-            <a:ext cx="548640" cy="762000"/>
+            <a:off x="731520" y="4587240"/>
+            <a:ext cx="548640" cy="682752"/>
           </a:xfrm>
           <a:prstGeom prst="rect">
             <a:avLst/>
@@ -11697,8 +11697,8 @@
         </p:nvSpPr>
         <p:spPr>
           <a:xfrm>
-            <a:off x="1463040" y="4904232"/>
-            <a:ext cx="9966960" cy="762000"/>
+            <a:off x="1463040" y="4587240"/>
+            <a:ext cx="9966960" cy="682752"/>
           </a:xfrm>
           <a:prstGeom prst="rect">
             <a:avLst/>
@@ -11733,12 +11733,12 @@
         </p:nvSpPr>
         <p:spPr>
           <a:xfrm>
-            <a:off x="548640" y="5775960"/>
-            <a:ext cx="11064240" cy="762000"/>
+            <a:off x="548640" y="5379720"/>
+            <a:ext cx="11064240" cy="682752"/>
           </a:xfrm>
           <a:prstGeom prst="roundRect">
             <a:avLst>
-              <a:gd name="adj" fmla="val 14400"/>
+              <a:gd name="adj" fmla="val 16071"/>
             </a:avLst>
           </a:prstGeom>
           <a:solidFill>
@@ -11764,8 +11764,8 @@
         </p:nvSpPr>
         <p:spPr>
           <a:xfrm>
-            <a:off x="731520" y="5775960"/>
-            <a:ext cx="548640" cy="762000"/>
+            <a:off x="731520" y="5379720"/>
+            <a:ext cx="548640" cy="682752"/>
           </a:xfrm>
           <a:prstGeom prst="rect">
             <a:avLst/>
@@ -11800,8 +11800,8 @@
         </p:nvSpPr>
         <p:spPr>
           <a:xfrm>
-            <a:off x="1463040" y="5775960"/>
-            <a:ext cx="9966960" cy="762000"/>
+            <a:off x="1463040" y="5379720"/>
+            <a:ext cx="9966960" cy="682752"/>
           </a:xfrm>
           <a:prstGeom prst="rect">
             <a:avLst/>
